--- a/docs/reports/capstone_presentation_base.pptx
+++ b/docs/reports/capstone_presentation_base.pptx
@@ -8373,7 +8373,7 @@
                 </a:solidFill>
                 <a:latin typeface="Segoe UI"/>
               </a:rPr>
-              <a:t>python test_yolov10_video.py --video dashcam_test.mp4</a:t>
+              <a:t>python test_yolov10_video.py --video pothole_test_2.mp4</a:t>
             </a:r>
           </a:p>
           <a:p>
@@ -9084,7 +9084,7 @@
                 </a:solidFill>
                 <a:latin typeface="Segoe UI"/>
               </a:rPr>
-              <a:t>Run RDD2022 YOLOv8n + CV fallback in the live loop</a:t>
+              <a:t>Run RDD2022 YOLOv10n + CV fallback in the live loop</a:t>
             </a:r>
           </a:p>
           <a:p>
@@ -11103,7 +11103,7 @@
                 </a:solidFill>
                 <a:latin typeface="Segoe UI"/>
               </a:rPr>
-              <a:t>• Pothole engine (RDD2022 YOLOv8n + CV)</a:t>
+              <a:t>• Pothole engine (RDD2022 YOLOv10n + CV)</a:t>
             </a:r>
           </a:p>
           <a:p>
@@ -14233,7 +14233,7 @@
                 </a:solidFill>
                 <a:latin typeface="Segoe UI"/>
               </a:rPr>
-              <a:t>RDD2022 YOLOv8n + CV</a:t>
+              <a:t>RDD2022 YOLOv10n + CV</a:t>
             </a:r>
           </a:p>
         </p:txBody>
@@ -15892,7 +15892,7 @@
                 </a:solidFill>
                 <a:latin typeface="Segoe UI"/>
               </a:rPr>
-              <a:t>YOLOv8n fine-tuned on RDD2022 (India subset, pothole class)</a:t>
+              <a:t>Custom YOLOv10n fine-tuned on RDD2022 (India subset, D40 pothole class)</a:t>
             </a:r>
           </a:p>
           <a:p>
@@ -15917,7 +15917,7 @@
                 </a:solidFill>
                 <a:latin typeface="Segoe UI"/>
               </a:rPr>
-              <a:t>50 training epochs  •  weights: rdd2022_yolov8n.pt</a:t>
+              <a:t>50 training epochs  •  weights: best.pt (YOLOv10n)</a:t>
             </a:r>
           </a:p>
           <a:p>
